--- a/presentations/finops-cio-brief.pptx
+++ b/presentations/finops-cio-brief.pptx
@@ -770,7 +770,7 @@
           <a:p>
             <a:r>
               <a:rPr lang="en-US" dirty="0"/>
-              <a:t>The ordering is the argument, so walk it in the order shown. Quotas act in seconds and are the only thing on the slide that can stop money being spent. Alerts act in minutes to days. Ownership and budget thresholds are always-on and within the month. Everything a cost dashboard does is downstream of all four. The quote at the bottom is the technical fact underneath the whole section: billing data arrives a day or two late, so any control built on it reports rather than prevents. If the CIO takes one thing from part two, this is it. Expect pushback that limits will throttle legitimate growth. The answer is that a ceiling is not a target — it is the point at which a human is asked whether this was intended — and that every control here is reversible in minutes, which is what makes it safe to set conservatively and loosen later.</a:t>
+              <a:t>The reframe to make here is that there are two moments to control a cost, and most organizations only operate the second one. On the left is shift left: cost entering the engineering workflow at the moment the choice is made — priced architecture options, a cost diff on the pull request, tagging and budget rules enforced as policy in the pipeline. On the right are the runtime controls, which act on spend that already exists. The economics favour the left column heavily. The same decision costs a conversation at design, an edit at pull-request time, a migration once deployed and a negotiation once it is on a contract — nothing about the decision changed, only the price of revisiting it. Two things to say out loud. First, the external evidence: pre-deployment costing is the most requested capability in the State of FinOps 2026, so this is the direction of the discipline rather than a local preference. Second, the cultural condition — this works where FinOps partners with engineers and fails where it polices them. Nobody is being asked to become a pricing expert; they are being handed the number at the moment they are already deciding. If the CIO asks where to start, the pull-request cost diff is the answer: it lands inside a ritual every team already has, and it needs no new meeting.</a:t>
             </a:r>
             <a:endParaRPr lang="en-US" dirty="0"/>
           </a:p>
@@ -858,7 +858,7 @@
           <a:p>
             <a:r>
               <a:rPr lang="en-US" dirty="0"/>
-              <a:t>Land the plane on specifics. Ninety days, three phases, and nothing in it requires a purchase or a new team — that is deliberate, and worth saying, because a CIO has seen this proposal arrive with a licence attached before. Do not leave the room without the three decisions at the bottom. The third is the one people avoid: a limit that never blocks anything is treated as advisory, because it is. Ask explicitly whether we are willing to have a hard ceiling somewhere, and where. If time allows, the useful close is the outcome rather than the plan: at the end of this we are not promising a smaller bill, we are promising an invoice with nothing in it that has not already been seen, explained and decided about. A savings percentage promised before anyone can see where the waste is would be a guess. The longer 22-slide deck stands behind every claim here if anyone wants the detail — offer it as a follow-up rather than presenting from it.</a:t>
+              <a:t>Land the plane on specifics. Ninety days, three phases, and nothing in it requires a purchase or a new team — that is deliberate, and worth saying, because a CIO has seen this proposal arrive with a licence attached before. The pull-request cost estimate in weeks 5–8 is the shift-left commitment, and it is a pipeline step rather than a product. Do not leave the room without the three decisions at the bottom. The third is the one people avoid: a limit that never blocks anything is treated as advisory, because it is. Ask explicitly whether we are willing to have a hard ceiling somewhere, and where. If time allows, the useful close is the outcome rather than the plan: at the end of this we are not promising a smaller bill, we are promising an invoice with nothing in it that has not already been seen, explained and decided about. A savings percentage promised before anyone can see where the waste is would be a guess. The longer 23-slide deck stands behind every claim here if anyone wants the detail — offer it as a follow-up rather than presenting from it.</a:t>
             </a:r>
             <a:endParaRPr lang="en-US" dirty="0"/>
           </a:p>
@@ -4011,7 +4011,7 @@
                 <a:ea typeface="Cambria" pitchFamily="34" charset="-122"/>
                 <a:cs typeface="Cambria" pitchFamily="34" charset="-120"/>
               </a:rPr>
-              <a:t>Four controls, and only one of them is fast</a:t>
+              <a:t>Two moments to control a cost</a:t>
             </a:r>
             <a:endParaRPr lang="en-US" sz="3100" dirty="0"/>
           </a:p>
@@ -4050,7 +4050,7 @@
                 <a:ea typeface="Calibri" pitchFamily="34" charset="-122"/>
                 <a:cs typeface="Calibri" pitchFamily="34" charset="-120"/>
               </a:rPr>
-              <a:t>A report is not a control. These are, in the order they take effect.</a:t>
+              <a:t>Before it is deployed, when changing it is a conversation. After, when changing it is a migration.</a:t>
             </a:r>
             <a:endParaRPr lang="en-US" sz="1500" dirty="0"/>
           </a:p>
@@ -4064,12 +4064,12 @@
         </p:nvSpPr>
         <p:spPr>
           <a:xfrm>
-            <a:off x="548640" y="2121408"/>
-            <a:ext cx="5394960" cy="1737360"/>
+            <a:off x="548640" y="2011680"/>
+            <a:ext cx="5394960" cy="3529584"/>
           </a:xfrm>
           <a:prstGeom prst="roundRect">
             <a:avLst>
-              <a:gd name="adj" fmla="val 4737"/>
+              <a:gd name="adj" fmla="val 2332"/>
             </a:avLst>
           </a:prstGeom>
           <a:solidFill>
@@ -4080,14 +4080,95 @@
       </p:sp>
       <p:sp>
         <p:nvSpPr>
-          <p:cNvPr id="6" name="Shape 4"/>
-          <p:cNvSpPr/>
-          <p:nvPr/>
-        </p:nvSpPr>
-        <p:spPr>
-          <a:xfrm>
-            <a:off x="841248" y="2395728"/>
-            <a:ext cx="512064" cy="512064"/>
+          <p:cNvPr id="6" name="Text 4"/>
+          <p:cNvSpPr/>
+          <p:nvPr/>
+        </p:nvSpPr>
+        <p:spPr>
+          <a:xfrm>
+            <a:off x="859536" y="2176272"/>
+            <a:ext cx="4754880" cy="292608"/>
+          </a:xfrm>
+          <a:prstGeom prst="rect">
+            <a:avLst/>
+          </a:prstGeom>
+          <a:noFill/>
+          <a:ln/>
+        </p:spPr>
+        <p:txBody>
+          <a:bodyPr wrap="square" lIns="0" tIns="0" rIns="0" bIns="0" rtlCol="0" anchor="ctr"/>
+          <a:lstStyle/>
+          <a:p>
+            <a:pPr indent="0" marL="0">
+              <a:buNone/>
+            </a:pPr>
+            <a:r>
+              <a:rPr lang="en-US" sz="1150" b="1" spc="160" kern="0" dirty="0">
+                <a:solidFill>
+                  <a:srgbClr val="E39B2C"/>
+                </a:solidFill>
+                <a:latin typeface="Calibri" pitchFamily="34" charset="0"/>
+                <a:ea typeface="Calibri" pitchFamily="34" charset="-122"/>
+                <a:cs typeface="Calibri" pitchFamily="34" charset="-120"/>
+              </a:rPr>
+              <a:t>BEFORE DEPLOY — SHIFT LEFT</a:t>
+            </a:r>
+            <a:endParaRPr lang="en-US" sz="1150" dirty="0"/>
+          </a:p>
+        </p:txBody>
+      </p:sp>
+      <p:sp>
+        <p:nvSpPr>
+          <p:cNvPr id="7" name="Text 5"/>
+          <p:cNvSpPr/>
+          <p:nvPr/>
+        </p:nvSpPr>
+        <p:spPr>
+          <a:xfrm>
+            <a:off x="859536" y="2505456"/>
+            <a:ext cx="4773168" cy="457200"/>
+          </a:xfrm>
+          <a:prstGeom prst="rect">
+            <a:avLst/>
+          </a:prstGeom>
+          <a:noFill/>
+          <a:ln/>
+        </p:spPr>
+        <p:txBody>
+          <a:bodyPr wrap="square" lIns="0" tIns="0" rIns="0" bIns="0" rtlCol="0" anchor="t"/>
+          <a:lstStyle/>
+          <a:p>
+            <a:pPr indent="0" marL="0">
+              <a:lnSpc>
+                <a:spcPts val="1700"/>
+              </a:lnSpc>
+              <a:buNone/>
+            </a:pPr>
+            <a:r>
+              <a:rPr lang="en-US" sz="1250" dirty="0">
+                <a:solidFill>
+                  <a:srgbClr val="9EABBA"/>
+                </a:solidFill>
+                <a:latin typeface="Calibri" pitchFamily="34" charset="0"/>
+                <a:ea typeface="Calibri" pitchFamily="34" charset="-122"/>
+                <a:cs typeface="Calibri" pitchFamily="34" charset="-120"/>
+              </a:rPr>
+              <a:t>Cost enters the engineering workflow, at the moment the choice is made.</a:t>
+            </a:r>
+            <a:endParaRPr lang="en-US" sz="1250" dirty="0"/>
+          </a:p>
+        </p:txBody>
+      </p:sp>
+      <p:sp>
+        <p:nvSpPr>
+          <p:cNvPr id="8" name="Shape 6"/>
+          <p:cNvSpPr/>
+          <p:nvPr/>
+        </p:nvSpPr>
+        <p:spPr>
+          <a:xfrm>
+            <a:off x="859536" y="3163824"/>
+            <a:ext cx="420624" cy="420624"/>
           </a:xfrm>
           <a:prstGeom prst="ellipse">
             <a:avLst/>
@@ -4100,7 +4181,7 @@
       </p:sp>
       <p:pic>
         <p:nvPicPr>
-          <p:cNvPr id="7" name="Image 0" descr="preencoded.png">    </p:cNvPr>
+          <p:cNvPr id="9" name="Image 0" descr="preencoded.png">    </p:cNvPr>
           <p:cNvPicPr>
             <a:picLocks noChangeAspect="1"/>
           </p:cNvPicPr>
@@ -4114,8 +4195,8 @@
         </p:blipFill>
         <p:spPr>
           <a:xfrm>
-            <a:off x="969264" y="2523744"/>
-            <a:ext cx="256032" cy="256032"/>
+            <a:off x="964692" y="3268980"/>
+            <a:ext cx="210312" cy="210312"/>
           </a:xfrm>
           <a:prstGeom prst="rect">
             <a:avLst/>
@@ -4124,14 +4205,14 @@
       </p:pic>
       <p:sp>
         <p:nvSpPr>
-          <p:cNvPr id="8" name="Text 5"/>
-          <p:cNvSpPr/>
-          <p:nvPr/>
-        </p:nvSpPr>
-        <p:spPr>
-          <a:xfrm>
-            <a:off x="1499616" y="2377440"/>
-            <a:ext cx="2834640" cy="548640"/>
+          <p:cNvPr id="10" name="Text 7"/>
+          <p:cNvSpPr/>
+          <p:nvPr/>
+        </p:nvSpPr>
+        <p:spPr>
+          <a:xfrm>
+            <a:off x="1426464" y="3072384"/>
+            <a:ext cx="4206240" cy="786384"/>
           </a:xfrm>
           <a:prstGeom prst="rect">
             <a:avLst/>
@@ -4141,84 +4222,6 @@
         </p:spPr>
         <p:txBody>
           <a:bodyPr wrap="square" lIns="0" tIns="0" rIns="0" bIns="0" rtlCol="0" anchor="ctr"/>
-          <a:lstStyle/>
-          <a:p>
-            <a:pPr indent="0" marL="0">
-              <a:buNone/>
-            </a:pPr>
-            <a:r>
-              <a:rPr lang="en-US" sz="1700" b="1" dirty="0">
-                <a:solidFill>
-                  <a:srgbClr val="FFFFFF"/>
-                </a:solidFill>
-                <a:latin typeface="Cambria" pitchFamily="34" charset="0"/>
-                <a:ea typeface="Cambria" pitchFamily="34" charset="-122"/>
-                <a:cs typeface="Cambria" pitchFamily="34" charset="-120"/>
-              </a:rPr>
-              <a:t>Rate limits &amp; quotas</a:t>
-            </a:r>
-            <a:endParaRPr lang="en-US" sz="1700" dirty="0"/>
-          </a:p>
-        </p:txBody>
-      </p:sp>
-      <p:sp>
-        <p:nvSpPr>
-          <p:cNvPr id="9" name="Text 6"/>
-          <p:cNvSpPr/>
-          <p:nvPr/>
-        </p:nvSpPr>
-        <p:spPr>
-          <a:xfrm>
-            <a:off x="4206240" y="2377440"/>
-            <a:ext cx="1426464" cy="548640"/>
-          </a:xfrm>
-          <a:prstGeom prst="rect">
-            <a:avLst/>
-          </a:prstGeom>
-          <a:noFill/>
-          <a:ln/>
-        </p:spPr>
-        <p:txBody>
-          <a:bodyPr wrap="square" lIns="0" tIns="0" rIns="0" bIns="0" rtlCol="0" anchor="ctr"/>
-          <a:lstStyle/>
-          <a:p>
-            <a:pPr algn="r" indent="0" marL="0">
-              <a:buNone/>
-            </a:pPr>
-            <a:r>
-              <a:rPr lang="en-US" sz="1200" b="1" dirty="0">
-                <a:solidFill>
-                  <a:srgbClr val="E39B2C"/>
-                </a:solidFill>
-                <a:latin typeface="Calibri" pitchFamily="34" charset="0"/>
-                <a:ea typeface="Calibri" pitchFamily="34" charset="-122"/>
-                <a:cs typeface="Calibri" pitchFamily="34" charset="-120"/>
-              </a:rPr>
-              <a:t>seconds</a:t>
-            </a:r>
-            <a:endParaRPr lang="en-US" sz="1200" dirty="0"/>
-          </a:p>
-        </p:txBody>
-      </p:sp>
-      <p:sp>
-        <p:nvSpPr>
-          <p:cNvPr id="10" name="Text 7"/>
-          <p:cNvSpPr/>
-          <p:nvPr/>
-        </p:nvSpPr>
-        <p:spPr>
-          <a:xfrm>
-            <a:off x="859536" y="2999232"/>
-            <a:ext cx="4773168" cy="749808"/>
-          </a:xfrm>
-          <a:prstGeom prst="rect">
-            <a:avLst/>
-          </a:prstGeom>
-          <a:noFill/>
-          <a:ln/>
-        </p:spPr>
-        <p:txBody>
-          <a:bodyPr wrap="square" lIns="0" tIns="0" rIns="0" bIns="0" rtlCol="0" anchor="t"/>
           <a:lstStyle/>
           <a:p>
             <a:pPr indent="0" marL="0">
@@ -4228,7 +4231,27 @@
               <a:buNone/>
             </a:pPr>
             <a:r>
-              <a:rPr lang="en-US" sz="1250" dirty="0">
+              <a:rPr lang="en-US" sz="1350" b="1" dirty="0">
+                <a:solidFill>
+                  <a:srgbClr val="FFFFFF"/>
+                </a:solidFill>
+                <a:latin typeface="Calibri" pitchFamily="34" charset="0"/>
+                <a:ea typeface="Calibri" pitchFamily="34" charset="-122"/>
+                <a:cs typeface="Calibri" pitchFamily="34" charset="-120"/>
+              </a:rPr>
+              <a:t>Priced architecture review</a:t>
+            </a:r>
+            <a:endParaRPr lang="en-US" sz="1350" dirty="0"/>
+          </a:p>
+          <a:p>
+            <a:pPr indent="0" marL="0">
+              <a:lnSpc>
+                <a:spcPts val="1600"/>
+              </a:lnSpc>
+              <a:buNone/>
+            </a:pPr>
+            <a:r>
+              <a:rPr lang="en-US" sz="1200" dirty="0">
                 <a:solidFill>
                   <a:srgbClr val="9EABBA"/>
                 </a:solidFill>
@@ -4236,9 +4259,9 @@
                 <a:ea typeface="Calibri" pitchFamily="34" charset="-122"/>
                 <a:cs typeface="Calibri" pitchFamily="34" charset="-120"/>
               </a:rPr>
-              <a:t>The only control that can stop spend in progress: token and request caps, gateway throttling, autoscale ceilings.</a:t>
-            </a:r>
-            <a:endParaRPr lang="en-US" sz="1250" dirty="0"/>
+              <a:t>Two or three options costed before one is chosen.</a:t>
+            </a:r>
+            <a:endParaRPr lang="en-US" sz="1350" dirty="0"/>
           </a:p>
         </p:txBody>
       </p:sp>
@@ -4250,30 +4273,8 @@
         </p:nvSpPr>
         <p:spPr>
           <a:xfrm>
-            <a:off x="6245352" y="2121408"/>
-            <a:ext cx="5394960" cy="1737360"/>
-          </a:xfrm>
-          <a:prstGeom prst="roundRect">
-            <a:avLst>
-              <a:gd name="adj" fmla="val 4737"/>
-            </a:avLst>
-          </a:prstGeom>
-          <a:solidFill>
-            <a:srgbClr val="1F2936"/>
-          </a:solidFill>
-          <a:ln/>
-        </p:spPr>
-      </p:sp>
-      <p:sp>
-        <p:nvSpPr>
-          <p:cNvPr id="12" name="Shape 9"/>
-          <p:cNvSpPr/>
-          <p:nvPr/>
-        </p:nvSpPr>
-        <p:spPr>
-          <a:xfrm>
-            <a:off x="6537960" y="2395728"/>
-            <a:ext cx="512064" cy="512064"/>
+            <a:off x="859536" y="3986784"/>
+            <a:ext cx="420624" cy="420624"/>
           </a:xfrm>
           <a:prstGeom prst="ellipse">
             <a:avLst/>
@@ -4286,7 +4287,7 @@
       </p:sp>
       <p:pic>
         <p:nvPicPr>
-          <p:cNvPr id="13" name="Image 1" descr="preencoded.png">    </p:cNvPr>
+          <p:cNvPr id="12" name="Image 1" descr="preencoded.png">    </p:cNvPr>
           <p:cNvPicPr>
             <a:picLocks noChangeAspect="1"/>
           </p:cNvPicPr>
@@ -4300,8 +4301,8 @@
         </p:blipFill>
         <p:spPr>
           <a:xfrm>
-            <a:off x="6665976" y="2523744"/>
-            <a:ext cx="256032" cy="256032"/>
+            <a:off x="964692" y="4091940"/>
+            <a:ext cx="210312" cy="210312"/>
           </a:xfrm>
           <a:prstGeom prst="rect">
             <a:avLst/>
@@ -4310,14 +4311,14 @@
       </p:pic>
       <p:sp>
         <p:nvSpPr>
-          <p:cNvPr id="14" name="Text 10"/>
-          <p:cNvSpPr/>
-          <p:nvPr/>
-        </p:nvSpPr>
-        <p:spPr>
-          <a:xfrm>
-            <a:off x="7196328" y="2377440"/>
-            <a:ext cx="2834640" cy="548640"/>
+          <p:cNvPr id="13" name="Text 9"/>
+          <p:cNvSpPr/>
+          <p:nvPr/>
+        </p:nvSpPr>
+        <p:spPr>
+          <a:xfrm>
+            <a:off x="1426464" y="3895344"/>
+            <a:ext cx="4206240" cy="786384"/>
           </a:xfrm>
           <a:prstGeom prst="rect">
             <a:avLst/>
@@ -4327,84 +4328,6 @@
         </p:spPr>
         <p:txBody>
           <a:bodyPr wrap="square" lIns="0" tIns="0" rIns="0" bIns="0" rtlCol="0" anchor="ctr"/>
-          <a:lstStyle/>
-          <a:p>
-            <a:pPr indent="0" marL="0">
-              <a:buNone/>
-            </a:pPr>
-            <a:r>
-              <a:rPr lang="en-US" sz="1700" b="1" dirty="0">
-                <a:solidFill>
-                  <a:srgbClr val="FFFFFF"/>
-                </a:solidFill>
-                <a:latin typeface="Cambria" pitchFamily="34" charset="0"/>
-                <a:ea typeface="Cambria" pitchFamily="34" charset="-122"/>
-                <a:cs typeface="Cambria" pitchFamily="34" charset="-120"/>
-              </a:rPr>
-              <a:t>Tiered alerts</a:t>
-            </a:r>
-            <a:endParaRPr lang="en-US" sz="1700" dirty="0"/>
-          </a:p>
-        </p:txBody>
-      </p:sp>
-      <p:sp>
-        <p:nvSpPr>
-          <p:cNvPr id="15" name="Text 11"/>
-          <p:cNvSpPr/>
-          <p:nvPr/>
-        </p:nvSpPr>
-        <p:spPr>
-          <a:xfrm>
-            <a:off x="9902952" y="2377440"/>
-            <a:ext cx="1426464" cy="548640"/>
-          </a:xfrm>
-          <a:prstGeom prst="rect">
-            <a:avLst/>
-          </a:prstGeom>
-          <a:noFill/>
-          <a:ln/>
-        </p:spPr>
-        <p:txBody>
-          <a:bodyPr wrap="square" lIns="0" tIns="0" rIns="0" bIns="0" rtlCol="0" anchor="ctr"/>
-          <a:lstStyle/>
-          <a:p>
-            <a:pPr algn="r" indent="0" marL="0">
-              <a:buNone/>
-            </a:pPr>
-            <a:r>
-              <a:rPr lang="en-US" sz="1200" b="1" dirty="0">
-                <a:solidFill>
-                  <a:srgbClr val="E39B2C"/>
-                </a:solidFill>
-                <a:latin typeface="Calibri" pitchFamily="34" charset="0"/>
-                <a:ea typeface="Calibri" pitchFamily="34" charset="-122"/>
-                <a:cs typeface="Calibri" pitchFamily="34" charset="-120"/>
-              </a:rPr>
-              <a:t>minutes to days</a:t>
-            </a:r>
-            <a:endParaRPr lang="en-US" sz="1200" dirty="0"/>
-          </a:p>
-        </p:txBody>
-      </p:sp>
-      <p:sp>
-        <p:nvSpPr>
-          <p:cNvPr id="16" name="Text 12"/>
-          <p:cNvSpPr/>
-          <p:nvPr/>
-        </p:nvSpPr>
-        <p:spPr>
-          <a:xfrm>
-            <a:off x="6556248" y="2999232"/>
-            <a:ext cx="4773168" cy="749808"/>
-          </a:xfrm>
-          <a:prstGeom prst="rect">
-            <a:avLst/>
-          </a:prstGeom>
-          <a:noFill/>
-          <a:ln/>
-        </p:spPr>
-        <p:txBody>
-          <a:bodyPr wrap="square" lIns="0" tIns="0" rIns="0" bIns="0" rtlCol="0" anchor="t"/>
           <a:lstStyle/>
           <a:p>
             <a:pPr indent="0" marL="0">
@@ -4414,7 +4337,27 @@
               <a:buNone/>
             </a:pPr>
             <a:r>
-              <a:rPr lang="en-US" sz="1250" dirty="0">
+              <a:rPr lang="en-US" sz="1350" b="1" dirty="0">
+                <a:solidFill>
+                  <a:srgbClr val="FFFFFF"/>
+                </a:solidFill>
+                <a:latin typeface="Calibri" pitchFamily="34" charset="0"/>
+                <a:ea typeface="Calibri" pitchFamily="34" charset="-122"/>
+                <a:cs typeface="Calibri" pitchFamily="34" charset="-120"/>
+              </a:rPr>
+              <a:t>Cost diff on the pull request</a:t>
+            </a:r>
+            <a:endParaRPr lang="en-US" sz="1350" dirty="0"/>
+          </a:p>
+          <a:p>
+            <a:pPr indent="0" marL="0">
+              <a:lnSpc>
+                <a:spcPts val="1600"/>
+              </a:lnSpc>
+              <a:buNone/>
+            </a:pPr>
+            <a:r>
+              <a:rPr lang="en-US" sz="1200" dirty="0">
                 <a:solidFill>
                   <a:srgbClr val="9EABBA"/>
                 </a:solidFill>
@@ -4422,44 +4365,22 @@
                 <a:ea typeface="Calibri" pitchFamily="34" charset="-122"/>
                 <a:cs typeface="Calibri" pitchFamily="34" charset="-120"/>
               </a:rPr>
-              <a:t>Usage-plane alerts page someone. Budget alerts go to a channel. Advisory alerts become tickets — never a page.</a:t>
-            </a:r>
-            <a:endParaRPr lang="en-US" sz="1250" dirty="0"/>
-          </a:p>
-        </p:txBody>
-      </p:sp>
-      <p:sp>
-        <p:nvSpPr>
-          <p:cNvPr id="17" name="Shape 13"/>
-          <p:cNvSpPr/>
-          <p:nvPr/>
-        </p:nvSpPr>
-        <p:spPr>
-          <a:xfrm>
-            <a:off x="548640" y="4041648"/>
-            <a:ext cx="5394960" cy="1737360"/>
-          </a:xfrm>
-          <a:prstGeom prst="roundRect">
-            <a:avLst>
-              <a:gd name="adj" fmla="val 4737"/>
-            </a:avLst>
-          </a:prstGeom>
-          <a:solidFill>
-            <a:srgbClr val="1F2936"/>
-          </a:solidFill>
-          <a:ln/>
-        </p:spPr>
-      </p:sp>
-      <p:sp>
-        <p:nvSpPr>
-          <p:cNvPr id="18" name="Shape 14"/>
-          <p:cNvSpPr/>
-          <p:nvPr/>
-        </p:nvSpPr>
-        <p:spPr>
-          <a:xfrm>
-            <a:off x="841248" y="4315968"/>
-            <a:ext cx="512064" cy="512064"/>
+              <a:t>Every infrastructure change shows its monthly delta.</a:t>
+            </a:r>
+            <a:endParaRPr lang="en-US" sz="1350" dirty="0"/>
+          </a:p>
+        </p:txBody>
+      </p:sp>
+      <p:sp>
+        <p:nvSpPr>
+          <p:cNvPr id="14" name="Shape 10"/>
+          <p:cNvSpPr/>
+          <p:nvPr/>
+        </p:nvSpPr>
+        <p:spPr>
+          <a:xfrm>
+            <a:off x="859536" y="4809744"/>
+            <a:ext cx="420624" cy="420624"/>
           </a:xfrm>
           <a:prstGeom prst="ellipse">
             <a:avLst/>
@@ -4472,7 +4393,7 @@
       </p:sp>
       <p:pic>
         <p:nvPicPr>
-          <p:cNvPr id="19" name="Image 2" descr="preencoded.png">    </p:cNvPr>
+          <p:cNvPr id="15" name="Image 2" descr="preencoded.png">    </p:cNvPr>
           <p:cNvPicPr>
             <a:picLocks noChangeAspect="1"/>
           </p:cNvPicPr>
@@ -4486,8 +4407,8 @@
         </p:blipFill>
         <p:spPr>
           <a:xfrm>
-            <a:off x="969264" y="4443984"/>
-            <a:ext cx="256032" cy="256032"/>
+            <a:off x="964692" y="4914900"/>
+            <a:ext cx="210312" cy="210312"/>
           </a:xfrm>
           <a:prstGeom prst="rect">
             <a:avLst/>
@@ -4496,14 +4417,14 @@
       </p:pic>
       <p:sp>
         <p:nvSpPr>
-          <p:cNvPr id="20" name="Text 15"/>
-          <p:cNvSpPr/>
-          <p:nvPr/>
-        </p:nvSpPr>
-        <p:spPr>
-          <a:xfrm>
-            <a:off x="1499616" y="4297680"/>
-            <a:ext cx="2834640" cy="548640"/>
+          <p:cNvPr id="16" name="Text 11"/>
+          <p:cNvSpPr/>
+          <p:nvPr/>
+        </p:nvSpPr>
+        <p:spPr>
+          <a:xfrm>
+            <a:off x="1426464" y="4718304"/>
+            <a:ext cx="4206240" cy="786384"/>
           </a:xfrm>
           <a:prstGeom prst="rect">
             <a:avLst/>
@@ -4513,84 +4434,6 @@
         </p:spPr>
         <p:txBody>
           <a:bodyPr wrap="square" lIns="0" tIns="0" rIns="0" bIns="0" rtlCol="0" anchor="ctr"/>
-          <a:lstStyle/>
-          <a:p>
-            <a:pPr indent="0" marL="0">
-              <a:buNone/>
-            </a:pPr>
-            <a:r>
-              <a:rPr lang="en-US" sz="1700" b="1" dirty="0">
-                <a:solidFill>
-                  <a:srgbClr val="FFFFFF"/>
-                </a:solidFill>
-                <a:latin typeface="Cambria" pitchFamily="34" charset="0"/>
-                <a:ea typeface="Cambria" pitchFamily="34" charset="-122"/>
-                <a:cs typeface="Cambria" pitchFamily="34" charset="-120"/>
-              </a:rPr>
-              <a:t>Named application owners</a:t>
-            </a:r>
-            <a:endParaRPr lang="en-US" sz="1700" dirty="0"/>
-          </a:p>
-        </p:txBody>
-      </p:sp>
-      <p:sp>
-        <p:nvSpPr>
-          <p:cNvPr id="21" name="Text 16"/>
-          <p:cNvSpPr/>
-          <p:nvPr/>
-        </p:nvSpPr>
-        <p:spPr>
-          <a:xfrm>
-            <a:off x="4206240" y="4297680"/>
-            <a:ext cx="1426464" cy="548640"/>
-          </a:xfrm>
-          <a:prstGeom prst="rect">
-            <a:avLst/>
-          </a:prstGeom>
-          <a:noFill/>
-          <a:ln/>
-        </p:spPr>
-        <p:txBody>
-          <a:bodyPr wrap="square" lIns="0" tIns="0" rIns="0" bIns="0" rtlCol="0" anchor="ctr"/>
-          <a:lstStyle/>
-          <a:p>
-            <a:pPr algn="r" indent="0" marL="0">
-              <a:buNone/>
-            </a:pPr>
-            <a:r>
-              <a:rPr lang="en-US" sz="1200" b="1" dirty="0">
-                <a:solidFill>
-                  <a:srgbClr val="2E8B7A"/>
-                </a:solidFill>
-                <a:latin typeface="Calibri" pitchFamily="34" charset="0"/>
-                <a:ea typeface="Calibri" pitchFamily="34" charset="-122"/>
-                <a:cs typeface="Calibri" pitchFamily="34" charset="-120"/>
-              </a:rPr>
-              <a:t>always on</a:t>
-            </a:r>
-            <a:endParaRPr lang="en-US" sz="1200" dirty="0"/>
-          </a:p>
-        </p:txBody>
-      </p:sp>
-      <p:sp>
-        <p:nvSpPr>
-          <p:cNvPr id="22" name="Text 17"/>
-          <p:cNvSpPr/>
-          <p:nvPr/>
-        </p:nvSpPr>
-        <p:spPr>
-          <a:xfrm>
-            <a:off x="859536" y="4919472"/>
-            <a:ext cx="4773168" cy="749808"/>
-          </a:xfrm>
-          <a:prstGeom prst="rect">
-            <a:avLst/>
-          </a:prstGeom>
-          <a:noFill/>
-          <a:ln/>
-        </p:spPr>
-        <p:txBody>
-          <a:bodyPr wrap="square" lIns="0" tIns="0" rIns="0" bIns="0" rtlCol="0" anchor="t"/>
           <a:lstStyle/>
           <a:p>
             <a:pPr indent="0" marL="0">
@@ -4600,7 +4443,27 @@
               <a:buNone/>
             </a:pPr>
             <a:r>
-              <a:rPr lang="en-US" sz="1250" dirty="0">
+              <a:rPr lang="en-US" sz="1350" b="1" dirty="0">
+                <a:solidFill>
+                  <a:srgbClr val="FFFFFF"/>
+                </a:solidFill>
+                <a:latin typeface="Calibri" pitchFamily="34" charset="0"/>
+                <a:ea typeface="Calibri" pitchFamily="34" charset="-122"/>
+                <a:cs typeface="Calibri" pitchFamily="34" charset="-120"/>
+              </a:rPr>
+              <a:t>Policy as code</a:t>
+            </a:r>
+            <a:endParaRPr lang="en-US" sz="1350" dirty="0"/>
+          </a:p>
+          <a:p>
+            <a:pPr indent="0" marL="0">
+              <a:lnSpc>
+                <a:spcPts val="1600"/>
+              </a:lnSpc>
+              <a:buNone/>
+            </a:pPr>
+            <a:r>
+              <a:rPr lang="en-US" sz="1200" dirty="0">
                 <a:solidFill>
                   <a:srgbClr val="9EABBA"/>
                 </a:solidFill>
@@ -4608,26 +4471,26 @@
                 <a:ea typeface="Calibri" pitchFamily="34" charset="-122"/>
                 <a:cs typeface="Calibri" pitchFamily="34" charset="-120"/>
               </a:rPr>
-              <a:t>One person per workload who owns the budget, answers the alert and retires what is unused.</a:t>
-            </a:r>
-            <a:endParaRPr lang="en-US" sz="1250" dirty="0"/>
-          </a:p>
-        </p:txBody>
-      </p:sp>
-      <p:sp>
-        <p:nvSpPr>
-          <p:cNvPr id="23" name="Shape 18"/>
-          <p:cNvSpPr/>
-          <p:nvPr/>
-        </p:nvSpPr>
-        <p:spPr>
-          <a:xfrm>
-            <a:off x="6245352" y="4041648"/>
-            <a:ext cx="5394960" cy="1737360"/>
+              <a:t>Tagging and budget rules enforced in the pipeline.</a:t>
+            </a:r>
+            <a:endParaRPr lang="en-US" sz="1350" dirty="0"/>
+          </a:p>
+        </p:txBody>
+      </p:sp>
+      <p:sp>
+        <p:nvSpPr>
+          <p:cNvPr id="17" name="Shape 12"/>
+          <p:cNvSpPr/>
+          <p:nvPr/>
+        </p:nvSpPr>
+        <p:spPr>
+          <a:xfrm>
+            <a:off x="6245352" y="2011680"/>
+            <a:ext cx="5394960" cy="3529584"/>
           </a:xfrm>
           <a:prstGeom prst="roundRect">
             <a:avLst>
-              <a:gd name="adj" fmla="val 4737"/>
+              <a:gd name="adj" fmla="val 2332"/>
             </a:avLst>
           </a:prstGeom>
           <a:solidFill>
@@ -4638,14 +4501,95 @@
       </p:sp>
       <p:sp>
         <p:nvSpPr>
-          <p:cNvPr id="24" name="Shape 19"/>
-          <p:cNvSpPr/>
-          <p:nvPr/>
-        </p:nvSpPr>
-        <p:spPr>
-          <a:xfrm>
-            <a:off x="6537960" y="4315968"/>
-            <a:ext cx="512064" cy="512064"/>
+          <p:cNvPr id="18" name="Text 13"/>
+          <p:cNvSpPr/>
+          <p:nvPr/>
+        </p:nvSpPr>
+        <p:spPr>
+          <a:xfrm>
+            <a:off x="6556248" y="2176272"/>
+            <a:ext cx="4754880" cy="292608"/>
+          </a:xfrm>
+          <a:prstGeom prst="rect">
+            <a:avLst/>
+          </a:prstGeom>
+          <a:noFill/>
+          <a:ln/>
+        </p:spPr>
+        <p:txBody>
+          <a:bodyPr wrap="square" lIns="0" tIns="0" rIns="0" bIns="0" rtlCol="0" anchor="ctr"/>
+          <a:lstStyle/>
+          <a:p>
+            <a:pPr indent="0" marL="0">
+              <a:buNone/>
+            </a:pPr>
+            <a:r>
+              <a:rPr lang="en-US" sz="1150" b="1" spc="160" kern="0" dirty="0">
+                <a:solidFill>
+                  <a:srgbClr val="2E8B7A"/>
+                </a:solidFill>
+                <a:latin typeface="Calibri" pitchFamily="34" charset="0"/>
+                <a:ea typeface="Calibri" pitchFamily="34" charset="-122"/>
+                <a:cs typeface="Calibri" pitchFamily="34" charset="-120"/>
+              </a:rPr>
+              <a:t>AFTER DEPLOY — RUNTIME</a:t>
+            </a:r>
+            <a:endParaRPr lang="en-US" sz="1150" dirty="0"/>
+          </a:p>
+        </p:txBody>
+      </p:sp>
+      <p:sp>
+        <p:nvSpPr>
+          <p:cNvPr id="19" name="Text 14"/>
+          <p:cNvSpPr/>
+          <p:nvPr/>
+        </p:nvSpPr>
+        <p:spPr>
+          <a:xfrm>
+            <a:off x="6556248" y="2505456"/>
+            <a:ext cx="4773168" cy="457200"/>
+          </a:xfrm>
+          <a:prstGeom prst="rect">
+            <a:avLst/>
+          </a:prstGeom>
+          <a:noFill/>
+          <a:ln/>
+        </p:spPr>
+        <p:txBody>
+          <a:bodyPr wrap="square" lIns="0" tIns="0" rIns="0" bIns="0" rtlCol="0" anchor="t"/>
+          <a:lstStyle/>
+          <a:p>
+            <a:pPr indent="0" marL="0">
+              <a:lnSpc>
+                <a:spcPts val="1700"/>
+              </a:lnSpc>
+              <a:buNone/>
+            </a:pPr>
+            <a:r>
+              <a:rPr lang="en-US" sz="1250" dirty="0">
+                <a:solidFill>
+                  <a:srgbClr val="9EABBA"/>
+                </a:solidFill>
+                <a:latin typeface="Calibri" pitchFamily="34" charset="0"/>
+                <a:ea typeface="Calibri" pitchFamily="34" charset="-122"/>
+                <a:cs typeface="Calibri" pitchFamily="34" charset="-120"/>
+              </a:rPr>
+              <a:t>Controls that act on spend already running, in the order they take effect.</a:t>
+            </a:r>
+            <a:endParaRPr lang="en-US" sz="1250" dirty="0"/>
+          </a:p>
+        </p:txBody>
+      </p:sp>
+      <p:sp>
+        <p:nvSpPr>
+          <p:cNvPr id="20" name="Shape 15"/>
+          <p:cNvSpPr/>
+          <p:nvPr/>
+        </p:nvSpPr>
+        <p:spPr>
+          <a:xfrm>
+            <a:off x="6556248" y="3163824"/>
+            <a:ext cx="420624" cy="420624"/>
           </a:xfrm>
           <a:prstGeom prst="ellipse">
             <a:avLst/>
@@ -4658,7 +4602,7 @@
       </p:sp>
       <p:pic>
         <p:nvPicPr>
-          <p:cNvPr id="25" name="Image 3" descr="preencoded.png">    </p:cNvPr>
+          <p:cNvPr id="21" name="Image 3" descr="preencoded.png">    </p:cNvPr>
           <p:cNvPicPr>
             <a:picLocks noChangeAspect="1"/>
           </p:cNvPicPr>
@@ -4672,8 +4616,8 @@
         </p:blipFill>
         <p:spPr>
           <a:xfrm>
-            <a:off x="6665976" y="4443984"/>
-            <a:ext cx="256032" cy="256032"/>
+            <a:off x="6661404" y="3268980"/>
+            <a:ext cx="210312" cy="210312"/>
           </a:xfrm>
           <a:prstGeom prst="rect">
             <a:avLst/>
@@ -4682,14 +4626,14 @@
       </p:pic>
       <p:sp>
         <p:nvSpPr>
-          <p:cNvPr id="26" name="Text 20"/>
-          <p:cNvSpPr/>
-          <p:nvPr/>
-        </p:nvSpPr>
-        <p:spPr>
-          <a:xfrm>
-            <a:off x="7196328" y="4297680"/>
-            <a:ext cx="2834640" cy="548640"/>
+          <p:cNvPr id="22" name="Text 16"/>
+          <p:cNvSpPr/>
+          <p:nvPr/>
+        </p:nvSpPr>
+        <p:spPr>
+          <a:xfrm>
+            <a:off x="7123176" y="3072384"/>
+            <a:ext cx="4206240" cy="786384"/>
           </a:xfrm>
           <a:prstGeom prst="rect">
             <a:avLst/>
@@ -4699,84 +4643,6 @@
         </p:spPr>
         <p:txBody>
           <a:bodyPr wrap="square" lIns="0" tIns="0" rIns="0" bIns="0" rtlCol="0" anchor="ctr"/>
-          <a:lstStyle/>
-          <a:p>
-            <a:pPr indent="0" marL="0">
-              <a:buNone/>
-            </a:pPr>
-            <a:r>
-              <a:rPr lang="en-US" sz="1700" b="1" dirty="0">
-                <a:solidFill>
-                  <a:srgbClr val="FFFFFF"/>
-                </a:solidFill>
-                <a:latin typeface="Cambria" pitchFamily="34" charset="0"/>
-                <a:ea typeface="Cambria" pitchFamily="34" charset="-122"/>
-                <a:cs typeface="Cambria" pitchFamily="34" charset="-120"/>
-              </a:rPr>
-              <a:t>Budget thresholds</a:t>
-            </a:r>
-            <a:endParaRPr lang="en-US" sz="1700" dirty="0"/>
-          </a:p>
-        </p:txBody>
-      </p:sp>
-      <p:sp>
-        <p:nvSpPr>
-          <p:cNvPr id="27" name="Text 21"/>
-          <p:cNvSpPr/>
-          <p:nvPr/>
-        </p:nvSpPr>
-        <p:spPr>
-          <a:xfrm>
-            <a:off x="9902952" y="4297680"/>
-            <a:ext cx="1426464" cy="548640"/>
-          </a:xfrm>
-          <a:prstGeom prst="rect">
-            <a:avLst/>
-          </a:prstGeom>
-          <a:noFill/>
-          <a:ln/>
-        </p:spPr>
-        <p:txBody>
-          <a:bodyPr wrap="square" lIns="0" tIns="0" rIns="0" bIns="0" rtlCol="0" anchor="ctr"/>
-          <a:lstStyle/>
-          <a:p>
-            <a:pPr algn="r" indent="0" marL="0">
-              <a:buNone/>
-            </a:pPr>
-            <a:r>
-              <a:rPr lang="en-US" sz="1200" b="1" dirty="0">
-                <a:solidFill>
-                  <a:srgbClr val="2E8B7A"/>
-                </a:solidFill>
-                <a:latin typeface="Calibri" pitchFamily="34" charset="0"/>
-                <a:ea typeface="Calibri" pitchFamily="34" charset="-122"/>
-                <a:cs typeface="Calibri" pitchFamily="34" charset="-120"/>
-              </a:rPr>
-              <a:t>within the month</a:t>
-            </a:r>
-            <a:endParaRPr lang="en-US" sz="1200" dirty="0"/>
-          </a:p>
-        </p:txBody>
-      </p:sp>
-      <p:sp>
-        <p:nvSpPr>
-          <p:cNvPr id="28" name="Text 22"/>
-          <p:cNvSpPr/>
-          <p:nvPr/>
-        </p:nvSpPr>
-        <p:spPr>
-          <a:xfrm>
-            <a:off x="6556248" y="4919472"/>
-            <a:ext cx="4773168" cy="749808"/>
-          </a:xfrm>
-          <a:prstGeom prst="rect">
-            <a:avLst/>
-          </a:prstGeom>
-          <a:noFill/>
-          <a:ln/>
-        </p:spPr>
-        <p:txBody>
-          <a:bodyPr wrap="square" lIns="0" tIns="0" rIns="0" bIns="0" rtlCol="0" anchor="t"/>
           <a:lstStyle/>
           <a:p>
             <a:pPr indent="0" marL="0">
@@ -4786,6 +4652,319 @@
               <a:buNone/>
             </a:pPr>
             <a:r>
+              <a:rPr lang="en-US" sz="1350" b="1" dirty="0">
+                <a:solidFill>
+                  <a:srgbClr val="FFFFFF"/>
+                </a:solidFill>
+                <a:latin typeface="Calibri" pitchFamily="34" charset="0"/>
+                <a:ea typeface="Calibri" pitchFamily="34" charset="-122"/>
+                <a:cs typeface="Calibri" pitchFamily="34" charset="-120"/>
+              </a:rPr>
+              <a:t>Quotas and rate limits</a:t>
+            </a:r>
+            <a:endParaRPr lang="en-US" sz="1350" dirty="0"/>
+          </a:p>
+          <a:p>
+            <a:pPr indent="0" marL="0">
+              <a:lnSpc>
+                <a:spcPts val="1600"/>
+              </a:lnSpc>
+              <a:buNone/>
+            </a:pPr>
+            <a:r>
+              <a:rPr lang="en-US" sz="1200" dirty="0">
+                <a:solidFill>
+                  <a:srgbClr val="9EABBA"/>
+                </a:solidFill>
+                <a:latin typeface="Calibri" pitchFamily="34" charset="0"/>
+                <a:ea typeface="Calibri" pitchFamily="34" charset="-122"/>
+                <a:cs typeface="Calibri" pitchFamily="34" charset="-120"/>
+              </a:rPr>
+              <a:t>Seconds. The only control that stops spend in progress.</a:t>
+            </a:r>
+            <a:endParaRPr lang="en-US" sz="1350" dirty="0"/>
+          </a:p>
+        </p:txBody>
+      </p:sp>
+      <p:sp>
+        <p:nvSpPr>
+          <p:cNvPr id="23" name="Shape 17"/>
+          <p:cNvSpPr/>
+          <p:nvPr/>
+        </p:nvSpPr>
+        <p:spPr>
+          <a:xfrm>
+            <a:off x="6556248" y="3986784"/>
+            <a:ext cx="420624" cy="420624"/>
+          </a:xfrm>
+          <a:prstGeom prst="ellipse">
+            <a:avLst/>
+          </a:prstGeom>
+          <a:solidFill>
+            <a:srgbClr val="2E3A48"/>
+          </a:solidFill>
+          <a:ln/>
+        </p:spPr>
+      </p:sp>
+      <p:pic>
+        <p:nvPicPr>
+          <p:cNvPr id="24" name="Image 4" descr="preencoded.png">    </p:cNvPr>
+          <p:cNvPicPr>
+            <a:picLocks noChangeAspect="1"/>
+          </p:cNvPicPr>
+          <p:nvPr/>
+        </p:nvPicPr>
+        <p:blipFill>
+          <a:blip r:embed="rId5"/>
+          <a:stretch>
+            <a:fillRect/>
+          </a:stretch>
+        </p:blipFill>
+        <p:spPr>
+          <a:xfrm>
+            <a:off x="6661404" y="4091940"/>
+            <a:ext cx="210312" cy="210312"/>
+          </a:xfrm>
+          <a:prstGeom prst="rect">
+            <a:avLst/>
+          </a:prstGeom>
+        </p:spPr>
+      </p:pic>
+      <p:sp>
+        <p:nvSpPr>
+          <p:cNvPr id="25" name="Text 18"/>
+          <p:cNvSpPr/>
+          <p:nvPr/>
+        </p:nvSpPr>
+        <p:spPr>
+          <a:xfrm>
+            <a:off x="7123176" y="3895344"/>
+            <a:ext cx="4206240" cy="786384"/>
+          </a:xfrm>
+          <a:prstGeom prst="rect">
+            <a:avLst/>
+          </a:prstGeom>
+          <a:noFill/>
+          <a:ln/>
+        </p:spPr>
+        <p:txBody>
+          <a:bodyPr wrap="square" lIns="0" tIns="0" rIns="0" bIns="0" rtlCol="0" anchor="ctr"/>
+          <a:lstStyle/>
+          <a:p>
+            <a:pPr indent="0" marL="0">
+              <a:lnSpc>
+                <a:spcPts val="1600"/>
+              </a:lnSpc>
+              <a:buNone/>
+            </a:pPr>
+            <a:r>
+              <a:rPr lang="en-US" sz="1350" b="1" dirty="0">
+                <a:solidFill>
+                  <a:srgbClr val="FFFFFF"/>
+                </a:solidFill>
+                <a:latin typeface="Calibri" pitchFamily="34" charset="0"/>
+                <a:ea typeface="Calibri" pitchFamily="34" charset="-122"/>
+                <a:cs typeface="Calibri" pitchFamily="34" charset="-120"/>
+              </a:rPr>
+              <a:t>Tiered alerts to named owners</a:t>
+            </a:r>
+            <a:endParaRPr lang="en-US" sz="1350" dirty="0"/>
+          </a:p>
+          <a:p>
+            <a:pPr indent="0" marL="0">
+              <a:lnSpc>
+                <a:spcPts val="1600"/>
+              </a:lnSpc>
+              <a:buNone/>
+            </a:pPr>
+            <a:r>
+              <a:rPr lang="en-US" sz="1200" dirty="0">
+                <a:solidFill>
+                  <a:srgbClr val="9EABBA"/>
+                </a:solidFill>
+                <a:latin typeface="Calibri" pitchFamily="34" charset="0"/>
+                <a:ea typeface="Calibri" pitchFamily="34" charset="-122"/>
+                <a:cs typeface="Calibri" pitchFamily="34" charset="-120"/>
+              </a:rPr>
+              <a:t>Minutes on usage data; never a page on a budget number.</a:t>
+            </a:r>
+            <a:endParaRPr lang="en-US" sz="1350" dirty="0"/>
+          </a:p>
+        </p:txBody>
+      </p:sp>
+      <p:sp>
+        <p:nvSpPr>
+          <p:cNvPr id="26" name="Shape 19"/>
+          <p:cNvSpPr/>
+          <p:nvPr/>
+        </p:nvSpPr>
+        <p:spPr>
+          <a:xfrm>
+            <a:off x="6556248" y="4809744"/>
+            <a:ext cx="420624" cy="420624"/>
+          </a:xfrm>
+          <a:prstGeom prst="ellipse">
+            <a:avLst/>
+          </a:prstGeom>
+          <a:solidFill>
+            <a:srgbClr val="2E3A48"/>
+          </a:solidFill>
+          <a:ln/>
+        </p:spPr>
+      </p:sp>
+      <p:pic>
+        <p:nvPicPr>
+          <p:cNvPr id="27" name="Image 5" descr="preencoded.png">    </p:cNvPr>
+          <p:cNvPicPr>
+            <a:picLocks noChangeAspect="1"/>
+          </p:cNvPicPr>
+          <p:nvPr/>
+        </p:nvPicPr>
+        <p:blipFill>
+          <a:blip r:embed="rId6"/>
+          <a:stretch>
+            <a:fillRect/>
+          </a:stretch>
+        </p:blipFill>
+        <p:spPr>
+          <a:xfrm>
+            <a:off x="6661404" y="4914900"/>
+            <a:ext cx="210312" cy="210312"/>
+          </a:xfrm>
+          <a:prstGeom prst="rect">
+            <a:avLst/>
+          </a:prstGeom>
+        </p:spPr>
+      </p:pic>
+      <p:sp>
+        <p:nvSpPr>
+          <p:cNvPr id="28" name="Text 20"/>
+          <p:cNvSpPr/>
+          <p:nvPr/>
+        </p:nvSpPr>
+        <p:spPr>
+          <a:xfrm>
+            <a:off x="7123176" y="4718304"/>
+            <a:ext cx="4206240" cy="786384"/>
+          </a:xfrm>
+          <a:prstGeom prst="rect">
+            <a:avLst/>
+          </a:prstGeom>
+          <a:noFill/>
+          <a:ln/>
+        </p:spPr>
+        <p:txBody>
+          <a:bodyPr wrap="square" lIns="0" tIns="0" rIns="0" bIns="0" rtlCol="0" anchor="ctr"/>
+          <a:lstStyle/>
+          <a:p>
+            <a:pPr indent="0" marL="0">
+              <a:lnSpc>
+                <a:spcPts val="1600"/>
+              </a:lnSpc>
+              <a:buNone/>
+            </a:pPr>
+            <a:r>
+              <a:rPr lang="en-US" sz="1350" b="1" dirty="0">
+                <a:solidFill>
+                  <a:srgbClr val="FFFFFF"/>
+                </a:solidFill>
+                <a:latin typeface="Calibri" pitchFamily="34" charset="0"/>
+                <a:ea typeface="Calibri" pitchFamily="34" charset="-122"/>
+                <a:cs typeface="Calibri" pitchFamily="34" charset="-120"/>
+              </a:rPr>
+              <a:t>Budget thresholds</a:t>
+            </a:r>
+            <a:endParaRPr lang="en-US" sz="1350" dirty="0"/>
+          </a:p>
+          <a:p>
+            <a:pPr indent="0" marL="0">
+              <a:lnSpc>
+                <a:spcPts val="1600"/>
+              </a:lnSpc>
+              <a:buNone/>
+            </a:pPr>
+            <a:r>
+              <a:rPr lang="en-US" sz="1200" dirty="0">
+                <a:solidFill>
+                  <a:srgbClr val="9EABBA"/>
+                </a:solidFill>
+                <a:latin typeface="Calibri" pitchFamily="34" charset="0"/>
+                <a:ea typeface="Calibri" pitchFamily="34" charset="-122"/>
+                <a:cs typeface="Calibri" pitchFamily="34" charset="-120"/>
+              </a:rPr>
+              <a:t>Notify, review, gate — measured against the elapsed month.</a:t>
+            </a:r>
+            <a:endParaRPr lang="en-US" sz="1350" dirty="0"/>
+          </a:p>
+        </p:txBody>
+      </p:sp>
+      <p:sp>
+        <p:nvSpPr>
+          <p:cNvPr id="29" name="Shape 21"/>
+          <p:cNvSpPr/>
+          <p:nvPr/>
+        </p:nvSpPr>
+        <p:spPr>
+          <a:xfrm>
+            <a:off x="548640" y="5687568"/>
+            <a:ext cx="11091672" cy="786384"/>
+          </a:xfrm>
+          <a:prstGeom prst="roundRect">
+            <a:avLst>
+              <a:gd name="adj" fmla="val 10465"/>
+            </a:avLst>
+          </a:prstGeom>
+          <a:solidFill>
+            <a:srgbClr val="1A222C"/>
+          </a:solidFill>
+          <a:ln/>
+        </p:spPr>
+      </p:sp>
+      <p:sp>
+        <p:nvSpPr>
+          <p:cNvPr id="30" name="Text 22"/>
+          <p:cNvSpPr/>
+          <p:nvPr/>
+        </p:nvSpPr>
+        <p:spPr>
+          <a:xfrm>
+            <a:off x="877824" y="5687568"/>
+            <a:ext cx="10424160" cy="786384"/>
+          </a:xfrm>
+          <a:prstGeom prst="rect">
+            <a:avLst/>
+          </a:prstGeom>
+          <a:noFill/>
+          <a:ln/>
+        </p:spPr>
+        <p:txBody>
+          <a:bodyPr wrap="square" lIns="0" tIns="0" rIns="0" bIns="0" rtlCol="0" anchor="ctr"/>
+          <a:lstStyle/>
+          <a:p>
+            <a:pPr indent="0" marL="0">
+              <a:lnSpc>
+                <a:spcPts val="1700"/>
+              </a:lnSpc>
+              <a:buNone/>
+            </a:pPr>
+            <a:r>
+              <a:rPr lang="en-US" sz="1250" b="1" dirty="0">
+                <a:solidFill>
+                  <a:srgbClr val="E39B2C"/>
+                </a:solidFill>
+                <a:latin typeface="Calibri" pitchFamily="34" charset="0"/>
+                <a:ea typeface="Calibri" pitchFamily="34" charset="-122"/>
+                <a:cs typeface="Calibri" pitchFamily="34" charset="-120"/>
+              </a:rPr>
+              <a:t>Pre-deployment costing is the most requested capability in the State of FinOps 2026. </a:t>
+            </a:r>
+            <a:pPr indent="0" marL="0">
+              <a:lnSpc>
+                <a:spcPts val="1700"/>
+              </a:lnSpc>
+              <a:buNone/>
+            </a:pPr>
+            <a:r>
               <a:rPr lang="en-US" sz="1250" dirty="0">
                 <a:solidFill>
                   <a:srgbClr val="9EABBA"/>
@@ -4794,48 +4973,9 @@
                 <a:ea typeface="Calibri" pitchFamily="34" charset="-122"/>
                 <a:cs typeface="Calibri" pitchFamily="34" charset="-120"/>
               </a:rPr>
-              <a:t>Notify, review, gate — measured against elapsed month, so drift shows in week one rather than at close.</a:t>
+              <a:t>It works where FinOps partners with engineers rather than policing them — and a cost alert still cannot stop a runaway job, because by the time billing moves the money is spent.</a:t>
             </a:r>
             <a:endParaRPr lang="en-US" sz="1250" dirty="0"/>
-          </a:p>
-        </p:txBody>
-      </p:sp>
-      <p:sp>
-        <p:nvSpPr>
-          <p:cNvPr id="29" name="Text 23"/>
-          <p:cNvSpPr/>
-          <p:nvPr/>
-        </p:nvSpPr>
-        <p:spPr>
-          <a:xfrm>
-            <a:off x="548640" y="5943600"/>
-            <a:ext cx="11091672" cy="566928"/>
-          </a:xfrm>
-          <a:prstGeom prst="rect">
-            <a:avLst/>
-          </a:prstGeom>
-          <a:noFill/>
-          <a:ln/>
-        </p:spPr>
-        <p:txBody>
-          <a:bodyPr wrap="square" lIns="0" tIns="0" rIns="0" bIns="0" rtlCol="0" anchor="ctr"/>
-          <a:lstStyle/>
-          <a:p>
-            <a:pPr indent="0" marL="0">
-              <a:buNone/>
-            </a:pPr>
-            <a:r>
-              <a:rPr lang="en-US" sz="1450" i="1" dirty="0">
-                <a:solidFill>
-                  <a:srgbClr val="E39B2C"/>
-                </a:solidFill>
-                <a:latin typeface="Cambria" pitchFamily="34" charset="0"/>
-                <a:ea typeface="Cambria" pitchFamily="34" charset="-122"/>
-                <a:cs typeface="Cambria" pitchFamily="34" charset="-120"/>
-              </a:rPr>
-              <a:t>“A cost alert cannot save you from a runaway job — by the time the billing data moves, the money is spent. Only the usage plane is fast enough.”</a:t>
-            </a:r>
-            <a:endParaRPr lang="en-US" sz="1450" dirty="0"/>
           </a:p>
         </p:txBody>
       </p:sp>
@@ -5329,7 +5469,7 @@
                 <a:ea typeface="Cambria" pitchFamily="34" charset="-122"/>
                 <a:cs typeface="Cambria" pitchFamily="34" charset="-120"/>
               </a:rPr>
-              <a:t>Guardrails, showback</a:t>
+              <a:t>Shift left, guardrails</a:t>
             </a:r>
             <a:endParaRPr lang="en-US" sz="1800" dirty="0"/>
           </a:p>
@@ -5391,7 +5531,7 @@
                 <a:ea typeface="Calibri" pitchFamily="34" charset="-122"/>
                 <a:cs typeface="Calibri" pitchFamily="34" charset="-120"/>
               </a:rPr>
-              <a:t>Quotas and autoscale ceilings on the top ten workloads</a:t>
+              <a:t>Cost estimate on every infrastructure pull request</a:t>
             </a:r>
             <a:endParaRPr lang="en-US" sz="1200" dirty="0"/>
           </a:p>
@@ -5453,7 +5593,7 @@
                 <a:ea typeface="Calibri" pitchFamily="34" charset="-122"/>
                 <a:cs typeface="Calibri" pitchFamily="34" charset="-120"/>
               </a:rPr>
-              <a:t>Alert tiers wired to owners, not to a shared mailbox</a:t>
+              <a:t>Quotas on the top ten workloads; alerts routed to owners</a:t>
             </a:r>
             <a:endParaRPr lang="en-US" sz="1200" dirty="0"/>
           </a:p>

--- a/presentations/finops-cio-brief.pptx
+++ b/presentations/finops-cio-brief.pptx
@@ -770,7 +770,7 @@
           <a:p>
             <a:r>
               <a:rPr lang="en-US" dirty="0"/>
-              <a:t>The reframe to make here is that there are two moments to control a cost, and most organizations only operate the second one. On the left is shift left: cost entering the engineering workflow at the moment the choice is made — priced architecture options, a cost diff on the pull request, tagging and budget rules enforced as policy in the pipeline. On the right are the runtime controls, which act on spend that already exists. The economics favour the left column heavily. The same decision costs a conversation at design, an edit at pull-request time, a migration once deployed and a negotiation once it is on a contract — nothing about the decision changed, only the price of revisiting it. Two things to say out loud. First, the external evidence: pre-deployment costing is the most requested capability in the State of FinOps 2026, so this is the direction of the discipline rather than a local preference. Second, the cultural condition — this works where FinOps partners with engineers and fails where it polices them. Nobody is being asked to become a pricing expert; they are being handed the number at the moment they are already deciding. If the CIO asks where to start, the pull-request cost diff is the answer: it lands inside a ritual every team already has, and it needs no new meeting.</a:t>
+              <a:t>The reframe to make here is that there are two moments to control a cost, and most organizations only operate the second one. Be precise about what shift left means, because it is usually heard as a tool purchase: it means the FinOps person is in the design and intake conversation, understanding what the project actually needs, at the point the architecture is chosen. The cost diff and the policy checks are how that decision is held afterwards — they are the enforcement, not the practice. The economics justify it. The same decision costs a conversation at design, an edit at pull-request time, a migration once deployed and a negotiation once it is on a contract. Nothing about the decision changed, only the price of revisiting it — and most of a workload's lifetime cost is settled once the architecture is agreed. Two things to say out loud. First the external evidence: pre-deployment costing is the most requested capability in the State of FinOps 2026, and the Framework names this work — Architecting &amp; Workload Placement, and Onboarding Workloads. Second the condition for it working: FinOps sits with engineers rather than auditing them. Nobody is being asked to become a pricing expert. If the CIO asks what this costs, the answer is someone's time in design reviews. If they ask where to start, it is the pull-request cost diff — it lands inside a ritual teams already have and needs no new meeting.</a:t>
             </a:r>
             <a:endParaRPr lang="en-US" dirty="0"/>
           </a:p>
@@ -4050,7 +4050,7 @@
                 <a:ea typeface="Calibri" pitchFamily="34" charset="-122"/>
                 <a:cs typeface="Calibri" pitchFamily="34" charset="-120"/>
               </a:rPr>
-              <a:t>Before it is deployed, when changing it is a conversation. After, when changing it is a migration.</a:t>
+              <a:t>At design, when changing it is a conversation. After deployment, when changing it is a migration.</a:t>
             </a:r>
             <a:endParaRPr lang="en-US" sz="1500" dirty="0"/>
           </a:p>
@@ -4153,7 +4153,7 @@
                 <a:ea typeface="Calibri" pitchFamily="34" charset="-122"/>
                 <a:cs typeface="Calibri" pitchFamily="34" charset="-120"/>
               </a:rPr>
-              <a:t>Cost enters the engineering workflow, at the moment the choice is made.</a:t>
+              <a:t>FinOps in the design conversation, where the decisions that commit the money are made.</a:t>
             </a:r>
             <a:endParaRPr lang="en-US" sz="1250" dirty="0"/>
           </a:p>
@@ -4239,7 +4239,7 @@
                 <a:ea typeface="Calibri" pitchFamily="34" charset="-122"/>
                 <a:cs typeface="Calibri" pitchFamily="34" charset="-120"/>
               </a:rPr>
-              <a:t>Priced architecture review</a:t>
+              <a:t>A seat at design and intake</a:t>
             </a:r>
             <a:endParaRPr lang="en-US" sz="1350" dirty="0"/>
           </a:p>
@@ -4259,7 +4259,7 @@
                 <a:ea typeface="Calibri" pitchFamily="34" charset="-122"/>
                 <a:cs typeface="Calibri" pitchFamily="34" charset="-120"/>
               </a:rPr>
-              <a:t>Two or three options costed before one is chosen.</a:t>
+              <a:t>Understand what the project needs before the architecture is set.</a:t>
             </a:r>
             <a:endParaRPr lang="en-US" sz="1350" dirty="0"/>
           </a:p>
@@ -4345,7 +4345,7 @@
                 <a:ea typeface="Calibri" pitchFamily="34" charset="-122"/>
                 <a:cs typeface="Calibri" pitchFamily="34" charset="-120"/>
               </a:rPr>
-              <a:t>Cost diff on the pull request</a:t>
+              <a:t>Options priced, target agreed</a:t>
             </a:r>
             <a:endParaRPr lang="en-US" sz="1350" dirty="0"/>
           </a:p>
@@ -4365,7 +4365,7 @@
                 <a:ea typeface="Calibri" pitchFamily="34" charset="-122"/>
                 <a:cs typeface="Calibri" pitchFamily="34" charset="-120"/>
               </a:rPr>
-              <a:t>Every infrastructure change shows its monthly delta.</a:t>
+              <a:t>Two or three costed; a cost target recorded beside the SLOs.</a:t>
             </a:r>
             <a:endParaRPr lang="en-US" sz="1350" dirty="0"/>
           </a:p>
@@ -4451,7 +4451,7 @@
                 <a:ea typeface="Calibri" pitchFamily="34" charset="-122"/>
                 <a:cs typeface="Calibri" pitchFamily="34" charset="-120"/>
               </a:rPr>
-              <a:t>Policy as code</a:t>
+              <a:t>Enforced in the pipeline</a:t>
             </a:r>
             <a:endParaRPr lang="en-US" sz="1350" dirty="0"/>
           </a:p>
@@ -4471,7 +4471,7 @@
                 <a:ea typeface="Calibri" pitchFamily="34" charset="-122"/>
                 <a:cs typeface="Calibri" pitchFamily="34" charset="-120"/>
               </a:rPr>
-              <a:t>Tagging and budget rules enforced in the pipeline.</a:t>
+              <a:t>Cost diff on the pull request; tagging and budget rules as policy.</a:t>
             </a:r>
             <a:endParaRPr lang="en-US" sz="1350" dirty="0"/>
           </a:p>
@@ -4973,7 +4973,7 @@
                 <a:ea typeface="Calibri" pitchFamily="34" charset="-122"/>
                 <a:cs typeface="Calibri" pitchFamily="34" charset="-120"/>
               </a:rPr>
-              <a:t>It works where FinOps partners with engineers rather than policing them — and a cost alert still cannot stop a runaway job, because by the time billing moves the money is spent.</a:t>
+              <a:t>It works where FinOps sits with engineers at design rather than auditing them afterwards — and a cost alert still cannot stop a runaway job, because by the time billing moves the money is spent.</a:t>
             </a:r>
             <a:endParaRPr lang="en-US" sz="1250" dirty="0"/>
           </a:p>

--- a/presentations/finops-cio-brief.pptx
+++ b/presentations/finops-cio-brief.pptx
@@ -506,7 +506,7 @@
           <a:p>
             <a:r>
               <a:rPr lang="en-US" dirty="0"/>
-              <a:t>Twelve minutes of material, so open on the ask and let the rest be evidence. The framing that works with a CIO is control, not thrift: this is the one large line where spending commitments are made daily, by engineers, with no approval step — everywhere else in the budget that would be considered a control gap. Fill in the three bullets with our own position before presenting: how long it actually took to explain the last unexpected increase, what share of spend currently lands unallocated, and whether any workload has a hard ceiling today. Specifics here are worth more than any slide later in the deck. Close the opening by reading the line under the asks — no new headcount, no platform purchase — because that is the first thing a CIO is calculating while you talk. If the meeting ends after this slide, the three asks are what you wanted.</a:t>
+              <a:t>Twelve minutes of material, so open on the ask and let the rest be evidence. The framing that works with a CIO is control, not thrift: this is the one large line where spending commitments are made daily, by engineers, with no approval step — everywhere else in the budget that would be considered a control gap. Fill in the three bullets with our own position before presenting: how long it actually took to explain the last unexpected increase, what share of spend currently lands unallocated, and whether any workload has a hard ceiling today. Specifics here are worth more than any slide later in the deck. The first bullet carries an external number so it does not read as our complaint — four in five organizations need a day or more to trace an AI cost spike to its source, and only about one in five manage it within hours. Source it if asked: the Harness 2026 State of AI in FinOps survey, 700 practitioners, run by Sapio Research. Say unprompted that it is vendor-sponsored research; the ownership and diagnosis-time findings are the solid ones. The useful framing it gives you is time to attribute a spike — a measurable operational number rather than a governance abstraction. Offer it as the metric this programme moves. Close the opening by reading the line under the asks — no new headcount, no platform purchase — because that is the first thing a CIO is calculating while you talk. If the meeting ends after this slide, the three asks are what you wanted.</a:t>
             </a:r>
             <a:endParaRPr lang="en-US" dirty="0"/>
           </a:p>
@@ -1474,7 +1474,7 @@
                 <a:ea typeface="Calibri" pitchFamily="34" charset="-122"/>
                 <a:cs typeface="Calibri" pitchFamily="34" charset="-120"/>
               </a:rPr>
-              <a:t>When the number moves, naming who caused it takes days — or never happens.</a:t>
+              <a:t>Four in five organizations need a day or more to trace an AI spike to its source.</a:t>
             </a:r>
             <a:endParaRPr lang="en-US" sz="1450" dirty="0"/>
           </a:p>
